--- a/apps/resources/bundled_files/2-klass-figuralar-oyun-atyshuu.pptx
+++ b/apps/resources/bundled_files/2-klass-figuralar-oyun-atyshuu.pptx
@@ -3797,7 +3797,7 @@
                 </a:solidFill>
                 <a:latin typeface="PT Sans"/>
               </a:rPr>
-              <a:t>2-класс ›</a:t>
+              <a:t/>
             </a:r>
           </a:p>
           <a:p>
@@ -4705,7 +4705,7 @@
                 </a:solidFill>
                 <a:latin typeface="PT Sans"/>
               </a:rPr>
-              <a:t>2-класс ›</a:t>
+              <a:t/>
             </a:r>
           </a:p>
           <a:p>
@@ -5235,7 +5235,7 @@
                 </a:solidFill>
                 <a:latin typeface="PT Sans"/>
               </a:rPr>
-              <a:t>2-класс ›</a:t>
+              <a:t/>
             </a:r>
           </a:p>
           <a:p>
@@ -5783,7 +5783,7 @@
                 </a:solidFill>
                 <a:latin typeface="PT Sans"/>
               </a:rPr>
-              <a:t>2-класс ›</a:t>
+              <a:t/>
             </a:r>
           </a:p>
           <a:p>
@@ -6243,7 +6243,7 @@
                 </a:solidFill>
                 <a:latin typeface="PT Sans"/>
               </a:rPr>
-              <a:t>2-класс ›</a:t>
+              <a:t/>
             </a:r>
           </a:p>
           <a:p>
@@ -6721,7 +6721,7 @@
                 </a:solidFill>
                 <a:latin typeface="PT Sans"/>
               </a:rPr>
-              <a:t>2-класс ›</a:t>
+              <a:t/>
             </a:r>
           </a:p>
           <a:p>
@@ -7805,7 +7805,7 @@
                 </a:solidFill>
                 <a:latin typeface="PT Sans"/>
               </a:rPr>
-              <a:t>2-класс ›</a:t>
+              <a:t/>
             </a:r>
           </a:p>
           <a:p>
@@ -8907,7 +8907,7 @@
                 </a:solidFill>
                 <a:latin typeface="PT Sans"/>
               </a:rPr>
-              <a:t>2-класс ›</a:t>
+              <a:t/>
             </a:r>
           </a:p>
           <a:p>
@@ -9367,7 +9367,7 @@
                 </a:solidFill>
                 <a:latin typeface="PT Sans"/>
               </a:rPr>
-              <a:t>2-класс ›</a:t>
+              <a:t/>
             </a:r>
           </a:p>
           <a:p>
@@ -9845,7 +9845,7 @@
                 </a:solidFill>
                 <a:latin typeface="PT Sans"/>
               </a:rPr>
-              <a:t>2-класс ›</a:t>
+              <a:t/>
             </a:r>
           </a:p>
           <a:p>
@@ -10372,7 +10372,7 @@
                 </a:solidFill>
                 <a:latin typeface="PT Sans"/>
               </a:rPr>
-              <a:t>2-класс ›</a:t>
+              <a:t/>
             </a:r>
           </a:p>
           <a:p>
@@ -10917,7 +10917,7 @@
                 </a:solidFill>
                 <a:latin typeface="PT Sans"/>
               </a:rPr>
-              <a:t>2-класс ›</a:t>
+              <a:t/>
             </a:r>
           </a:p>
           <a:p>
@@ -11441,7 +11441,7 @@
                 </a:solidFill>
                 <a:latin typeface="PT Sans"/>
               </a:rPr>
-              <a:t>2-класс ›</a:t>
+              <a:t/>
             </a:r>
           </a:p>
           <a:p>
@@ -11901,7 +11901,7 @@
                 </a:solidFill>
                 <a:latin typeface="PT Sans"/>
               </a:rPr>
-              <a:t>2-класс ›</a:t>
+              <a:t/>
             </a:r>
           </a:p>
           <a:p>
@@ -12379,7 +12379,7 @@
                 </a:solidFill>
                 <a:latin typeface="PT Sans"/>
               </a:rPr>
-              <a:t>2-класс ›</a:t>
+              <a:t/>
             </a:r>
           </a:p>
           <a:p>
@@ -13224,7 +13224,7 @@
                 </a:solidFill>
                 <a:latin typeface="PT Sans"/>
               </a:rPr>
-              <a:t>2-класс ›</a:t>
+              <a:t/>
             </a:r>
           </a:p>
           <a:p>
@@ -14087,7 +14087,7 @@
                 </a:solidFill>
                 <a:latin typeface="PT Sans"/>
               </a:rPr>
-              <a:t>2-класс ›</a:t>
+              <a:t/>
             </a:r>
           </a:p>
           <a:p>
@@ -14547,7 +14547,7 @@
                 </a:solidFill>
                 <a:latin typeface="PT Sans"/>
               </a:rPr>
-              <a:t>2-класс ›</a:t>
+              <a:t/>
             </a:r>
           </a:p>
           <a:p>
@@ -15025,7 +15025,7 @@
                 </a:solidFill>
                 <a:latin typeface="PT Sans"/>
               </a:rPr>
-              <a:t>2-класс ›</a:t>
+              <a:t/>
             </a:r>
           </a:p>
           <a:p>
@@ -15567,7 +15567,7 @@
                 </a:solidFill>
                 <a:latin typeface="PT Sans"/>
               </a:rPr>
-              <a:t>2-класс ›</a:t>
+              <a:t/>
             </a:r>
           </a:p>
           <a:p>
@@ -16027,7 +16027,7 @@
                 </a:solidFill>
                 <a:latin typeface="PT Sans"/>
               </a:rPr>
-              <a:t>2-класс ›</a:t>
+              <a:t/>
             </a:r>
           </a:p>
           <a:p>
@@ -16505,7 +16505,7 @@
                 </a:solidFill>
                 <a:latin typeface="PT Sans"/>
               </a:rPr>
-              <a:t>2-класс ›</a:t>
+              <a:t/>
             </a:r>
           </a:p>
           <a:p>
@@ -17226,7 +17226,7 @@
                 </a:solidFill>
                 <a:latin typeface="PT Sans"/>
               </a:rPr>
-              <a:t>2-класс ›</a:t>
+              <a:t/>
             </a:r>
           </a:p>
           <a:p>
@@ -17965,7 +17965,7 @@
                 </a:solidFill>
                 <a:latin typeface="PT Sans"/>
               </a:rPr>
-              <a:t>2-класс ›</a:t>
+              <a:t/>
             </a:r>
           </a:p>
           <a:p>
@@ -18425,7 +18425,7 @@
                 </a:solidFill>
                 <a:latin typeface="PT Sans"/>
               </a:rPr>
-              <a:t>2-класс ›</a:t>
+              <a:t/>
             </a:r>
           </a:p>
           <a:p>
